--- a/Science_Complete_Course_SagarSir/03_Biology_जीव_विज्ञान/Class_15_Reproduction_Plants_Animals.pptx
+++ b/Science_Complete_Course_SagarSir/03_Biology_जीव_विज्ञान/Class_15_Reproduction_Plants_Animals.pptx
@@ -3556,7 +3556,7 @@
               </a:defRPr>
             </a:pPr>
             <a:r>
-              <a:t>मार्गदर्शक: सागर सर (NMMS King)  |  Helpline / WhatsApp: +91 91101 13671  |  Website: sagarcoaching.tech</a:t>
+              <a:t>मार्गदर्शक: सागर सर (NMMS King)  |  Website: sagarcoaching.tech</a:t>
             </a:r>
           </a:p>
         </p:txBody>
@@ -3728,7 +3728,7 @@
               </a:defRPr>
             </a:pPr>
             <a:r>
-              <a:t>WhatsApp / Helpline: +91 91101 13671  |  वेबसाइट: sagarcoaching.tech  |  Slide 10 of 36</a:t>
+              <a:t>वेबसाइट: sagarcoaching.tech  |  Slide 10 of 36</a:t>
             </a:r>
           </a:p>
         </p:txBody>
@@ -4246,7 +4246,7 @@
               </a:defRPr>
             </a:pPr>
             <a:r>
-              <a:t>WhatsApp / Helpline: +91 91101 13671  |  वेबसाइट: sagarcoaching.tech  |  Slide 11 of 36</a:t>
+              <a:t>वेबसाइट: sagarcoaching.tech  |  Slide 11 of 36</a:t>
             </a:r>
           </a:p>
         </p:txBody>
@@ -4693,7 +4693,7 @@
               </a:defRPr>
             </a:pPr>
             <a:r>
-              <a:t>WhatsApp / Helpline: +91 91101 13671  |  वेबसाइट: sagarcoaching.tech  |  Slide 12 of 36</a:t>
+              <a:t>वेबसाइट: sagarcoaching.tech  |  Slide 12 of 36</a:t>
             </a:r>
           </a:p>
         </p:txBody>
@@ -5211,7 +5211,7 @@
               </a:defRPr>
             </a:pPr>
             <a:r>
-              <a:t>WhatsApp / Helpline: +91 91101 13671  |  वेबसाइट: sagarcoaching.tech  |  Slide 13 of 36</a:t>
+              <a:t>वेबसाइट: sagarcoaching.tech  |  Slide 13 of 36</a:t>
             </a:r>
           </a:p>
         </p:txBody>
@@ -5658,7 +5658,7 @@
               </a:defRPr>
             </a:pPr>
             <a:r>
-              <a:t>WhatsApp / Helpline: +91 91101 13671  |  वेबसाइट: sagarcoaching.tech  |  Slide 14 of 36</a:t>
+              <a:t>वेबसाइट: sagarcoaching.tech  |  Slide 14 of 36</a:t>
             </a:r>
           </a:p>
         </p:txBody>
@@ -6176,7 +6176,7 @@
               </a:defRPr>
             </a:pPr>
             <a:r>
-              <a:t>WhatsApp / Helpline: +91 91101 13671  |  वेबसाइट: sagarcoaching.tech  |  Slide 15 of 36</a:t>
+              <a:t>वेबसाइट: sagarcoaching.tech  |  Slide 15 of 36</a:t>
             </a:r>
           </a:p>
         </p:txBody>
@@ -6623,7 +6623,7 @@
               </a:defRPr>
             </a:pPr>
             <a:r>
-              <a:t>WhatsApp / Helpline: +91 91101 13671  |  वेबसाइट: sagarcoaching.tech  |  Slide 16 of 36</a:t>
+              <a:t>वेबसाइट: sagarcoaching.tech  |  Slide 16 of 36</a:t>
             </a:r>
           </a:p>
         </p:txBody>
@@ -7141,7 +7141,7 @@
               </a:defRPr>
             </a:pPr>
             <a:r>
-              <a:t>WhatsApp / Helpline: +91 91101 13671  |  वेबसाइट: sagarcoaching.tech  |  Slide 17 of 36</a:t>
+              <a:t>वेबसाइट: sagarcoaching.tech  |  Slide 17 of 36</a:t>
             </a:r>
           </a:p>
         </p:txBody>
@@ -7588,7 +7588,7 @@
               </a:defRPr>
             </a:pPr>
             <a:r>
-              <a:t>WhatsApp / Helpline: +91 91101 13671  |  वेबसाइट: sagarcoaching.tech  |  Slide 18 of 36</a:t>
+              <a:t>वेबसाइट: sagarcoaching.tech  |  Slide 18 of 36</a:t>
             </a:r>
           </a:p>
         </p:txBody>
@@ -8106,7 +8106,7 @@
               </a:defRPr>
             </a:pPr>
             <a:r>
-              <a:t>WhatsApp / Helpline: +91 91101 13671  |  वेबसाइट: sagarcoaching.tech  |  Slide 19 of 36</a:t>
+              <a:t>वेबसाइट: sagarcoaching.tech  |  Slide 19 of 36</a:t>
             </a:r>
           </a:p>
         </p:txBody>
@@ -8553,7 +8553,7 @@
               </a:defRPr>
             </a:pPr>
             <a:r>
-              <a:t>WhatsApp / Helpline: +91 91101 13671  |  वेबसाइट: sagarcoaching.tech  |  Slide 2 of 36</a:t>
+              <a:t>वेबसाइट: sagarcoaching.tech  |  Slide 2 of 36</a:t>
             </a:r>
           </a:p>
         </p:txBody>
@@ -8894,7 +8894,7 @@
               </a:defRPr>
             </a:pPr>
             <a:r>
-              <a:t>WhatsApp / Helpline: +91 91101 13671  |  वेबसाइट: sagarcoaching.tech  |  Slide 20 of 36</a:t>
+              <a:t>वेबसाइट: sagarcoaching.tech  |  Slide 20 of 36</a:t>
             </a:r>
           </a:p>
         </p:txBody>
@@ -9412,7 +9412,7 @@
               </a:defRPr>
             </a:pPr>
             <a:r>
-              <a:t>WhatsApp / Helpline: +91 91101 13671  |  वेबसाइट: sagarcoaching.tech  |  Slide 21 of 36</a:t>
+              <a:t>वेबसाइट: sagarcoaching.tech  |  Slide 21 of 36</a:t>
             </a:r>
           </a:p>
         </p:txBody>
@@ -9859,7 +9859,7 @@
               </a:defRPr>
             </a:pPr>
             <a:r>
-              <a:t>WhatsApp / Helpline: +91 91101 13671  |  वेबसाइट: sagarcoaching.tech  |  Slide 22 of 36</a:t>
+              <a:t>वेबसाइट: sagarcoaching.tech  |  Slide 22 of 36</a:t>
             </a:r>
           </a:p>
         </p:txBody>
@@ -10377,7 +10377,7 @@
               </a:defRPr>
             </a:pPr>
             <a:r>
-              <a:t>WhatsApp / Helpline: +91 91101 13671  |  वेबसाइट: sagarcoaching.tech  |  Slide 23 of 36</a:t>
+              <a:t>वेबसाइट: sagarcoaching.tech  |  Slide 23 of 36</a:t>
             </a:r>
           </a:p>
         </p:txBody>
@@ -10824,7 +10824,7 @@
               </a:defRPr>
             </a:pPr>
             <a:r>
-              <a:t>WhatsApp / Helpline: +91 91101 13671  |  वेबसाइट: sagarcoaching.tech  |  Slide 24 of 36</a:t>
+              <a:t>वेबसाइट: sagarcoaching.tech  |  Slide 24 of 36</a:t>
             </a:r>
           </a:p>
         </p:txBody>
@@ -11342,7 +11342,7 @@
               </a:defRPr>
             </a:pPr>
             <a:r>
-              <a:t>WhatsApp / Helpline: +91 91101 13671  |  वेबसाइट: sagarcoaching.tech  |  Slide 25 of 36</a:t>
+              <a:t>वेबसाइट: sagarcoaching.tech  |  Slide 25 of 36</a:t>
             </a:r>
           </a:p>
         </p:txBody>
@@ -11789,7 +11789,7 @@
               </a:defRPr>
             </a:pPr>
             <a:r>
-              <a:t>WhatsApp / Helpline: +91 91101 13671  |  वेबसाइट: sagarcoaching.tech  |  Slide 26 of 36</a:t>
+              <a:t>वेबसाइट: sagarcoaching.tech  |  Slide 26 of 36</a:t>
             </a:r>
           </a:p>
         </p:txBody>
@@ -12307,7 +12307,7 @@
               </a:defRPr>
             </a:pPr>
             <a:r>
-              <a:t>WhatsApp / Helpline: +91 91101 13671  |  वेबसाइट: sagarcoaching.tech  |  Slide 27 of 36</a:t>
+              <a:t>वेबसाइट: sagarcoaching.tech  |  Slide 27 of 36</a:t>
             </a:r>
           </a:p>
         </p:txBody>
@@ -12754,7 +12754,7 @@
               </a:defRPr>
             </a:pPr>
             <a:r>
-              <a:t>WhatsApp / Helpline: +91 91101 13671  |  वेबसाइट: sagarcoaching.tech  |  Slide 28 of 36</a:t>
+              <a:t>वेबसाइट: sagarcoaching.tech  |  Slide 28 of 36</a:t>
             </a:r>
           </a:p>
         </p:txBody>
@@ -13272,7 +13272,7 @@
               </a:defRPr>
             </a:pPr>
             <a:r>
-              <a:t>WhatsApp / Helpline: +91 91101 13671  |  वेबसाइट: sagarcoaching.tech  |  Slide 29 of 36</a:t>
+              <a:t>वेबसाइट: sagarcoaching.tech  |  Slide 29 of 36</a:t>
             </a:r>
           </a:p>
         </p:txBody>
@@ -13719,7 +13719,7 @@
               </a:defRPr>
             </a:pPr>
             <a:r>
-              <a:t>WhatsApp / Helpline: +91 91101 13671  |  वेबसाइट: sagarcoaching.tech  |  Slide 3 of 36</a:t>
+              <a:t>वेबसाइट: sagarcoaching.tech  |  Slide 3 of 36</a:t>
             </a:r>
           </a:p>
         </p:txBody>
@@ -14049,7 +14049,7 @@
               </a:defRPr>
             </a:pPr>
             <a:r>
-              <a:t>WhatsApp / Helpline: +91 91101 13671  |  वेबसाइट: sagarcoaching.tech  |  Slide 30 of 36</a:t>
+              <a:t>वेबसाइट: sagarcoaching.tech  |  Slide 30 of 36</a:t>
             </a:r>
           </a:p>
         </p:txBody>
@@ -14567,7 +14567,7 @@
               </a:defRPr>
             </a:pPr>
             <a:r>
-              <a:t>WhatsApp / Helpline: +91 91101 13671  |  वेबसाइट: sagarcoaching.tech  |  Slide 31 of 36</a:t>
+              <a:t>वेबसाइट: sagarcoaching.tech  |  Slide 31 of 36</a:t>
             </a:r>
           </a:p>
         </p:txBody>
@@ -15014,7 +15014,7 @@
               </a:defRPr>
             </a:pPr>
             <a:r>
-              <a:t>WhatsApp / Helpline: +91 91101 13671  |  वेबसाइट: sagarcoaching.tech  |  Slide 32 of 36</a:t>
+              <a:t>वेबसाइट: sagarcoaching.tech  |  Slide 32 of 36</a:t>
             </a:r>
           </a:p>
         </p:txBody>
@@ -15532,7 +15532,7 @@
               </a:defRPr>
             </a:pPr>
             <a:r>
-              <a:t>WhatsApp / Helpline: +91 91101 13671  |  वेबसाइट: sagarcoaching.tech  |  Slide 33 of 36</a:t>
+              <a:t>वेबसाइट: sagarcoaching.tech  |  Slide 33 of 36</a:t>
             </a:r>
           </a:p>
         </p:txBody>
@@ -15979,7 +15979,7 @@
               </a:defRPr>
             </a:pPr>
             <a:r>
-              <a:t>WhatsApp / Helpline: +91 91101 13671  |  वेबसाइट: sagarcoaching.tech  |  Slide 34 of 36</a:t>
+              <a:t>वेबसाइट: sagarcoaching.tech  |  Slide 34 of 36</a:t>
             </a:r>
           </a:p>
         </p:txBody>
@@ -16497,7 +16497,7 @@
               </a:defRPr>
             </a:pPr>
             <a:r>
-              <a:t>WhatsApp / Helpline: +91 91101 13671  |  वेबसाइट: sagarcoaching.tech  |  Slide 35 of 36</a:t>
+              <a:t>वेबसाइट: sagarcoaching.tech  |  Slide 35 of 36</a:t>
             </a:r>
           </a:p>
         </p:txBody>
@@ -16819,7 +16819,7 @@
               </a:defRPr>
             </a:pPr>
             <a:r>
-              <a:t>WhatsApp / Helpline: +91 91101 13671  |  वेबसाइट: sagarcoaching.tech  |  Slide 36 of 36</a:t>
+              <a:t>वेबसाइट: sagarcoaching.tech  |  Slide 36 of 36</a:t>
             </a:r>
           </a:p>
         </p:txBody>
@@ -17103,7 +17103,7 @@
               </a:defRPr>
             </a:pPr>
             <a:r>
-              <a:t>WhatsApp / Helpline: +91 91101 13671  |  वेबसाइट: sagarcoaching.tech  |  Slide 4 of 36</a:t>
+              <a:t>वेबसाइट: sagarcoaching.tech  |  Slide 4 of 36</a:t>
             </a:r>
           </a:p>
         </p:txBody>
@@ -17438,7 +17438,7 @@
               </a:defRPr>
             </a:pPr>
             <a:r>
-              <a:t>WhatsApp / Helpline: +91 91101 13671  |  वेबसाइट: sagarcoaching.tech  |  Slide 5 of 36</a:t>
+              <a:t>वेबसाइट: sagarcoaching.tech  |  Slide 5 of 36</a:t>
             </a:r>
           </a:p>
         </p:txBody>
@@ -17885,7 +17885,7 @@
               </a:defRPr>
             </a:pPr>
             <a:r>
-              <a:t>WhatsApp / Helpline: +91 91101 13671  |  वेबसाइट: sagarcoaching.tech  |  Slide 6 of 36</a:t>
+              <a:t>वेबसाइट: sagarcoaching.tech  |  Slide 6 of 36</a:t>
             </a:r>
           </a:p>
         </p:txBody>
@@ -18403,7 +18403,7 @@
               </a:defRPr>
             </a:pPr>
             <a:r>
-              <a:t>WhatsApp / Helpline: +91 91101 13671  |  वेबसाइट: sagarcoaching.tech  |  Slide 7 of 36</a:t>
+              <a:t>वेबसाइट: sagarcoaching.tech  |  Slide 7 of 36</a:t>
             </a:r>
           </a:p>
         </p:txBody>
@@ -18850,7 +18850,7 @@
               </a:defRPr>
             </a:pPr>
             <a:r>
-              <a:t>WhatsApp / Helpline: +91 91101 13671  |  वेबसाइट: sagarcoaching.tech  |  Slide 8 of 36</a:t>
+              <a:t>वेबसाइट: sagarcoaching.tech  |  Slide 8 of 36</a:t>
             </a:r>
           </a:p>
         </p:txBody>
@@ -19368,7 +19368,7 @@
               </a:defRPr>
             </a:pPr>
             <a:r>
-              <a:t>WhatsApp / Helpline: +91 91101 13671  |  वेबसाइट: sagarcoaching.tech  |  Slide 9 of 36</a:t>
+              <a:t>वेबसाइट: sagarcoaching.tech  |  Slide 9 of 36</a:t>
             </a:r>
           </a:p>
         </p:txBody>
